--- a/ground-vehicle/docs/courses/beginner-switch/l3_controller_programming.pptx
+++ b/ground-vehicle/docs/courses/beginner-switch/l3_controller_programming.pptx
@@ -1221,7 +1221,7 @@
               <a:rPr sz="1200">
                 <a:latin typeface="Calibri"/>
               </a:rPr>
-              <a:t>On the Switch track, step 7 gives them the MY_CONTROLLER line they need for the rest of the day. Make sure it is written down or pasted immediately - it is easy to lose.</a:t>
+              <a:t>Step 7 gives them the MY_CONTROLLER line they need for the rest of the day. Make sure it is written down or pasted immediately - it is easy to lose.</a:t>
             </a:r>
           </a:p>
           <a:p>
@@ -1230,6 +1230,30 @@
                 <a:latin typeface="Calibri"/>
               </a:rPr>
               <a:t>Walk round with a list of button names. Somebody will find a button that prints nothing, and that is usually a third-party pad rather than a fault.</a:t>
+            </a:r>
+          </a:p>
+          <a:p>
+            <a:r>
+              <a:rPr sz="1200">
+                <a:latin typeface="Calibri"/>
+              </a:rPr>
+              <a:t>The sticks print at most four times a second, on purpose - PRINT_MS in the sketch. Anybody who wants to see why can set it to 20 and watch the window scroll away.</a:t>
+            </a:r>
+          </a:p>
+          <a:p>
+            <a:r>
+              <a:rPr sz="1200">
+                <a:latin typeface="Calibri"/>
+              </a:rPr>
+              <a:t>ANSWER, Y axis: pushing UP gives a NEGATIVE number, down a positive one (-512 to +511). That is why the driving code puts a minus sign in front of the Y reading.</a:t>
+            </a:r>
+          </a:p>
+          <a:p>
+            <a:r>
+              <a:rPr sz="1200">
+                <a:latin typeface="Calibri"/>
+              </a:rPr>
+              <a:t>ANSWER, drift: it depends on the pad, which is the point. A worn stick usually rests a few counts off zero. Collect the numbers from the room - the biggest one is what the deadzone has to beat, and it is the next section.</a:t>
             </a:r>
           </a:p>
         </p:txBody>
@@ -1480,7 +1504,7 @@
               <a:rPr sz="1200">
                 <a:latin typeface="Calibri"/>
               </a:rPr>
-              <a:t>Ask why the line does not start at zero. The answer - a stick at rest is never exactly centered - is worth getting from the room rather than telling them.</a:t>
+              <a:t>Ask why the ramp does not start at the origin. The answer - a stick at rest is never exactly centered - is worth getting from the room rather than telling them.</a:t>
             </a:r>
           </a:p>
           <a:p>
@@ -1488,7 +1512,7 @@
               <a:rPr sz="1200">
                 <a:latin typeface="Calibri"/>
               </a:rPr>
-              <a:t>The jump at the deadzone edge is deliberate: below the minimum duty the motor buzzes instead of turning, so the map skips straight past it.</a:t>
+              <a:t>With MOTOR_MIN at 0 the ramp leaves the deadzone edge at zero speed, with no jump. Step 5 of the next activity sets MOTOR_MIN to 60, and then the speed jumps from 0 straight to 60 at the edge. That is what a speed floor looks like.</a:t>
             </a:r>
           </a:p>
           <a:p>
@@ -1650,6 +1674,14 @@
               <a:rPr sz="1200">
                 <a:latin typeface="Calibri"/>
               </a:rPr>
+              <a:t>Make them work the middle one out before you say it. Half the stick is NOT exactly half speed, because map() works in whole numbers and throws the fraction away - the 7 / 2 trap from Lesson 1, in a place where it actually matters.</a:t>
+            </a:r>
+          </a:p>
+          <a:p>
+            <a:r>
+              <a:rPr sz="1200">
+                <a:latin typeface="Calibri"/>
+              </a:rPr>
               <a:t>The important subtlety is on the last line: the low end is the DEADZONE, not zero. Without that, the leftover travel could never reach full speed.</a:t>
             </a:r>
           </a:p>
@@ -1766,6 +1798,22 @@
               <a:t>Step 5 previews MOTOR_MIN, which they met in Lesson 2. The jump the instant they leave the deadzone is what a raised minimum feels like.</a:t>
             </a:r>
           </a:p>
+          <a:p>
+            <a:r>
+              <a:rPr sz="1200">
+                <a:latin typeface="Calibri"/>
+              </a:rPr>
+              <a:t>ANSWER, deadzone 0: it would creep. The resting drift is no longer thrown away, so it turns into a small motor speed - the speed column stops reading 0 even with nobody touching the pad.</a:t>
+            </a:r>
+          </a:p>
+          <a:p>
+            <a:r>
+              <a:rPr sz="1200">
+                <a:latin typeface="Calibri"/>
+              </a:rPr>
+              <a:t>ANSWER, MOTOR_MIN = 60: the speed jumps from 0 straight to 60 the moment the stick leaves the deadzone, instead of starting from 0. You want it for motors that will not turn at all below some duty - the number they found with l2b_speed_ramp. These vehicles drive fine without it, which is why it ships at 0.</a:t>
+            </a:r>
+          </a:p>
         </p:txBody>
       </p:sp>
       <p:sp>
@@ -1917,7 +1965,7 @@
               <a:rPr sz="1200">
                 <a:latin typeface="Calibri"/>
               </a:rPr>
-              <a:t>The half-power steering choice is a design decision, not a limitation. Explain the reasoning: full-power steering spins faster than anybody can correct for.</a:t>
+              <a:t>The 75% steering limit is a design decision, not a limitation. Explain the reasoning: full-power steering spins faster than anybody can correct for.</a:t>
             </a:r>
           </a:p>
           <a:p>
@@ -2146,6 +2194,14 @@
               <a:t>Give this the full thirty minutes. It is the payoff for three lessons of groundwork.</a:t>
             </a:r>
           </a:p>
+          <a:p>
+            <a:r>
+              <a:rPr sz="1200">
+                <a:latin typeface="Calibri"/>
+              </a:rPr>
+              <a:t>ANSWER: the wheels stopped within about a second of the link dropping, and picked up again when the pad came back in range. The four lines are the if at the very top of loop(): no controller, so drive(0, 0) and return before anything else runs.</a:t>
+            </a:r>
+          </a:p>
         </p:txBody>
       </p:sp>
       <p:sp>
@@ -2276,6 +2332,14 @@
               <a:t>Give this the full thirty minutes. It is the payoff for three lessons of groundwork.</a:t>
             </a:r>
           </a:p>
+          <a:p>
+            <a:r>
+              <a:rPr sz="1200">
+                <a:latin typeface="Calibri"/>
+              </a:rPr>
+              <a:t>ANSWER: the wheels stopped within about a second of the link dropping, and picked up again when the pad came back in range. The four lines are the if at the very top of loop(): no controller, so drive(0, 0) and return before anything else runs.</a:t>
+            </a:r>
+          </a:p>
         </p:txBody>
       </p:sp>
       <p:sp>
@@ -2406,6 +2470,14 @@
               <a:t>Give this the full thirty minutes. It is the payoff for three lessons of groundwork.</a:t>
             </a:r>
           </a:p>
+          <a:p>
+            <a:r>
+              <a:rPr sz="1200">
+                <a:latin typeface="Calibri"/>
+              </a:rPr>
+              <a:t>ANSWER: the wheels stopped within about a second of the link dropping, and picked up again when the pad came back in range. The four lines are the if at the very top of loop(): no controller, so drive(0, 0) and return before anything else runs.</a:t>
+            </a:r>
+          </a:p>
         </p:txBody>
       </p:sp>
       <p:sp>
@@ -2775,7 +2847,7 @@
               <a:rPr sz="1200">
                 <a:latin typeface="Calibri"/>
               </a:rPr>
-              <a:t>The answer to question 7, in full:  if (!Ps3.isConnected()) { drive(0, 0); return; }  - four lines if you count the closing brace, and they go at the very top of loop().</a:t>
+              <a:t>The answer to question 7, in full:  if (myController == nullptr || !myController-&gt;isConnected()) { drive(0, 0); return; }  - four lines if you count the closing brace, and they go at the very top of loop().</a:t>
             </a:r>
           </a:p>
           <a:p>
@@ -13526,7 +13598,7 @@
         <p:spPr>
           <a:xfrm>
             <a:off x="7163537" y="2304288"/>
-            <a:ext cx="4525238" cy="1360833"/>
+            <a:ext cx="4525238" cy="1672143"/>
           </a:xfrm>
           <a:prstGeom prst="rect">
             <a:avLst/>
@@ -13546,21 +13618,21 @@
               <a:spcAft>
                 <a:spcPts val="300"/>
               </a:spcAft>
-              <a:defRPr sz="2600" b="0">
-                <a:solidFill>
-                  <a:srgbClr val="222222"/>
-                </a:solidFill>
-                <a:latin typeface="Calibri"/>
-              </a:defRPr>
-            </a:pPr>
-            <a:r>
-              <a:rPr sz="2600" b="0">
-                <a:solidFill>
-                  <a:srgbClr val="222222"/>
-                </a:solidFill>
-                <a:latin typeface="Calibri"/>
-              </a:rPr>
-              <a:t>A line for every press, every release, and every stick movement.</a:t>
+              <a:defRPr sz="2500" b="0">
+                <a:solidFill>
+                  <a:srgbClr val="222222"/>
+                </a:solidFill>
+                <a:latin typeface="Calibri"/>
+              </a:defRPr>
+            </a:pPr>
+            <a:r>
+              <a:rPr sz="2500" b="0">
+                <a:solidFill>
+                  <a:srgbClr val="222222"/>
+                </a:solidFill>
+                <a:latin typeface="Calibri"/>
+              </a:rPr>
+              <a:t>A line for every press and every release, and up to four lines a second while a stick moves.</a:t>
             </a:r>
           </a:p>
         </p:txBody>
@@ -13573,7 +13645,7 @@
         </p:nvSpPr>
         <p:spPr>
           <a:xfrm>
-            <a:off x="7163537" y="3738273"/>
+            <a:off x="7163537" y="4049583"/>
             <a:ext cx="4525238" cy="365760"/>
           </a:xfrm>
           <a:prstGeom prst="rect">
@@ -13621,8 +13693,8 @@
         </p:nvSpPr>
         <p:spPr>
           <a:xfrm>
-            <a:off x="7163537" y="4140609"/>
-            <a:ext cx="4525238" cy="2123030"/>
+            <a:off x="7163537" y="4451919"/>
+            <a:ext cx="4525238" cy="1811720"/>
           </a:xfrm>
           <a:prstGeom prst="rect">
             <a:avLst/>
@@ -13642,15 +13714,15 @@
               <a:spcAft>
                 <a:spcPts val="300"/>
               </a:spcAft>
-              <a:defRPr sz="2500" b="0">
-                <a:solidFill>
-                  <a:srgbClr val="222222"/>
-                </a:solidFill>
-                <a:latin typeface="Calibri"/>
-              </a:defRPr>
-            </a:pPr>
-            <a:r>
-              <a:rPr sz="2500" b="0">
+              <a:defRPr sz="2400" b="0">
+                <a:solidFill>
+                  <a:srgbClr val="222222"/>
+                </a:solidFill>
+                <a:latin typeface="Calibri"/>
+              </a:defRPr>
+            </a:pPr>
+            <a:r>
+              <a:rPr sz="2400" b="0">
                 <a:solidFill>
                   <a:srgbClr val="222222"/>
                 </a:solidFill>
@@ -13667,15 +13739,15 @@
               <a:spcAft>
                 <a:spcPts val="300"/>
               </a:spcAft>
-              <a:defRPr sz="2500" b="0">
-                <a:solidFill>
-                  <a:srgbClr val="222222"/>
-                </a:solidFill>
-                <a:latin typeface="Calibri"/>
-              </a:defRPr>
-            </a:pPr>
-            <a:r>
-              <a:rPr sz="2500" b="0">
+              <a:defRPr sz="2400" b="0">
+                <a:solidFill>
+                  <a:srgbClr val="222222"/>
+                </a:solidFill>
+                <a:latin typeface="Calibri"/>
+              </a:defRPr>
+            </a:pPr>
+            <a:r>
+              <a:rPr sz="2400" b="0">
                 <a:solidFill>
                   <a:srgbClr val="222222"/>
                 </a:solidFill>
@@ -16850,7 +16922,7 @@
                 </a:solidFill>
                 <a:latin typeface="Consolas"/>
               </a:rPr>
-              <a:t>map(255, 0, 255, 0, 255)   -&gt;  127</a:t>
+              <a:t>map(255, 0, 511, 0, 255)   -&gt;  127</a:t>
             </a:r>
           </a:p>
           <a:p>
@@ -17036,17 +17108,17 @@
                 <a:spcPct val="100000"/>
               </a:lnSpc>
               <a:spcAft>
-                <a:spcPts val="700"/>
-              </a:spcAft>
-              <a:defRPr sz="2100" b="0">
-                <a:solidFill>
-                  <a:srgbClr val="222222"/>
-                </a:solidFill>
-                <a:latin typeface="Calibri"/>
-              </a:defRPr>
-            </a:pPr>
-            <a:r>
-              <a:rPr sz="2100" b="0">
+                <a:spcPts val="600"/>
+              </a:spcAft>
+              <a:defRPr sz="1800" b="0">
+                <a:solidFill>
+                  <a:srgbClr val="222222"/>
+                </a:solidFill>
+                <a:latin typeface="Calibri"/>
+              </a:defRPr>
+            </a:pPr>
+            <a:r>
+              <a:rPr sz="1800" b="0">
                 <a:solidFill>
                   <a:srgbClr val="222222"/>
                 </a:solidFill>
@@ -17061,17 +17133,42 @@
                 <a:spcPct val="100000"/>
               </a:lnSpc>
               <a:spcAft>
-                <a:spcPts val="700"/>
-              </a:spcAft>
-              <a:defRPr sz="2100" b="0">
-                <a:solidFill>
-                  <a:srgbClr val="222222"/>
-                </a:solidFill>
-                <a:latin typeface="Calibri"/>
-              </a:defRPr>
-            </a:pPr>
-            <a:r>
-              <a:rPr sz="2100" b="0">
+                <a:spcPts val="600"/>
+              </a:spcAft>
+              <a:defRPr sz="1800" b="0">
+                <a:solidFill>
+                  <a:srgbClr val="222222"/>
+                </a:solidFill>
+                <a:latin typeface="Calibri"/>
+              </a:defRPr>
+            </a:pPr>
+            <a:r>
+              <a:rPr sz="1800" b="0">
+                <a:solidFill>
+                  <a:srgbClr val="222222"/>
+                </a:solidFill>
+                <a:latin typeface="Calibri"/>
+              </a:rPr>
+              <a:t>It works in WHOLE numbers. 255 x 255 / 511 is 127.250..., and the fraction is thrown away - not rounded - just like 7 / 2 in Lesson 1.</a:t>
+            </a:r>
+          </a:p>
+          <a:p>
+            <a:pPr algn="l">
+              <a:lnSpc>
+                <a:spcPct val="100000"/>
+              </a:lnSpc>
+              <a:spcAft>
+                <a:spcPts val="600"/>
+              </a:spcAft>
+              <a:defRPr sz="1800" b="0">
+                <a:solidFill>
+                  <a:srgbClr val="222222"/>
+                </a:solidFill>
+                <a:latin typeface="Calibri"/>
+              </a:defRPr>
+            </a:pPr>
+            <a:r>
+              <a:rPr sz="1800" b="0">
                 <a:solidFill>
                   <a:srgbClr val="222222"/>
                 </a:solidFill>
@@ -17086,17 +17183,17 @@
                 <a:spcPct val="100000"/>
               </a:lnSpc>
               <a:spcAft>
-                <a:spcPts val="700"/>
-              </a:spcAft>
-              <a:defRPr sz="2100" b="0">
-                <a:solidFill>
-                  <a:srgbClr val="222222"/>
-                </a:solidFill>
-                <a:latin typeface="Calibri"/>
-              </a:defRPr>
-            </a:pPr>
-            <a:r>
-              <a:rPr sz="2100" b="0">
+                <a:spcPts val="600"/>
+              </a:spcAft>
+              <a:defRPr sz="1800" b="0">
+                <a:solidFill>
+                  <a:srgbClr val="222222"/>
+                </a:solidFill>
+                <a:latin typeface="Calibri"/>
+              </a:defRPr>
+            </a:pPr>
+            <a:r>
+              <a:rPr sz="1800" b="0">
                 <a:solidFill>
                   <a:srgbClr val="222222"/>
                 </a:solidFill>
@@ -17427,7 +17524,7 @@
                 </a:solidFill>
                 <a:latin typeface="Calibri"/>
               </a:rPr>
-              <a:t>1.  Upload it. Nothing moves - this is print only.</a:t>
+              <a:t>1.  Paste your MY_CONTROLLER line into the top. Upload it. Nothing moves - this is print only.</a:t>
             </a:r>
           </a:p>
           <a:p>
@@ -17589,7 +17686,7 @@
         <p:spPr>
           <a:xfrm>
             <a:off x="7163537" y="2304288"/>
-            <a:ext cx="4525238" cy="1292958"/>
+            <a:ext cx="4525238" cy="1516072"/>
           </a:xfrm>
           <a:prstGeom prst="rect">
             <a:avLst/>
@@ -17609,21 +17706,21 @@
               <a:spcAft>
                 <a:spcPts val="300"/>
               </a:spcAft>
-              <a:defRPr sz="2500" b="0">
-                <a:solidFill>
-                  <a:srgbClr val="222222"/>
-                </a:solidFill>
-                <a:latin typeface="Calibri"/>
-              </a:defRPr>
-            </a:pPr>
-            <a:r>
-              <a:rPr sz="2500" b="0">
-                <a:solidFill>
-                  <a:srgbClr val="222222"/>
-                </a:solidFill>
-                <a:latin typeface="Calibri"/>
-              </a:rPr>
-              <a:t>Two columns: the raw number from the controller, and the motor speed it turns into.</a:t>
+              <a:defRPr sz="2200" b="0">
+                <a:solidFill>
+                  <a:srgbClr val="222222"/>
+                </a:solidFill>
+                <a:latin typeface="Calibri"/>
+              </a:defRPr>
+            </a:pPr>
+            <a:r>
+              <a:rPr sz="2200" b="0">
+                <a:solidFill>
+                  <a:srgbClr val="222222"/>
+                </a:solidFill>
+                <a:latin typeface="Calibri"/>
+              </a:rPr>
+              <a:t>Two columns: the raw number from the controller, and the motor speed it turns into. A new line only when the stick moves.</a:t>
             </a:r>
           </a:p>
         </p:txBody>
@@ -17636,7 +17733,7 @@
         </p:nvSpPr>
         <p:spPr>
           <a:xfrm>
-            <a:off x="7163537" y="3670398"/>
+            <a:off x="7163537" y="3893512"/>
             <a:ext cx="4525238" cy="365760"/>
           </a:xfrm>
           <a:prstGeom prst="rect">
@@ -17684,8 +17781,8 @@
         </p:nvSpPr>
         <p:spPr>
           <a:xfrm>
-            <a:off x="7163537" y="4072734"/>
-            <a:ext cx="4525238" cy="2190905"/>
+            <a:off x="7163537" y="4295848"/>
+            <a:ext cx="4525238" cy="1967791"/>
           </a:xfrm>
           <a:prstGeom prst="rect">
             <a:avLst/>
@@ -20078,7 +20175,7 @@
                 </a:solidFill>
                 <a:latin typeface="Calibri"/>
               </a:rPr>
-              <a:t>1.  Wheels off the ground. Upload. Check that up is forward and right is right BEFORE you put it down.</a:t>
+              <a:t>1.  Paste your MY_CONTROLLER line into the top. Then wheels off the ground, upload, and check that up is forward and right is right BEFORE you put it down.</a:t>
             </a:r>
           </a:p>
           <a:p>
